--- a/docs/MedFusion-XAI_Presentation.pptx
+++ b/docs/MedFusion-XAI_Presentation.pptx
@@ -3501,8 +3501,8 @@
         </p:blipFill>
         <p:spPr>
           <a:xfrm>
-            <a:off x="548640" y="1371600"/>
-            <a:ext cx="8078346" cy="4297680"/>
+            <a:off x="365760" y="1965960"/>
+            <a:ext cx="5486400" cy="2918765"/>
           </a:xfrm>
           <a:prstGeom prst="rect">
             <a:avLst/>
@@ -3517,8 +3517,8 @@
         </p:nvSpPr>
         <p:spPr>
           <a:xfrm>
-            <a:off x="6309360" y="1645920"/>
-            <a:ext cx="5486400" cy="4937760"/>
+            <a:off x="6172200" y="1645920"/>
+            <a:ext cx="5669280" cy="5029200"/>
           </a:xfrm>
           <a:prstGeom prst="rect">
             <a:avLst/>
@@ -3834,8 +3834,8 @@
         </p:blipFill>
         <p:spPr>
           <a:xfrm>
-            <a:off x="548640" y="1371600"/>
-            <a:ext cx="8078346" cy="4297680"/>
+            <a:off x="365760" y="1965960"/>
+            <a:ext cx="5486400" cy="2918765"/>
           </a:xfrm>
           <a:prstGeom prst="rect">
             <a:avLst/>
@@ -3850,8 +3850,8 @@
         </p:nvSpPr>
         <p:spPr>
           <a:xfrm>
-            <a:off x="6309360" y="1554480"/>
-            <a:ext cx="5486400" cy="4937760"/>
+            <a:off x="6172200" y="1554480"/>
+            <a:ext cx="5669280" cy="5120640"/>
           </a:xfrm>
           <a:prstGeom prst="rect">
             <a:avLst/>
@@ -4144,7 +4144,7 @@
         <p:spPr>
           <a:xfrm>
             <a:off x="640080" y="1508760"/>
-            <a:ext cx="10972800" cy="4937760"/>
+            <a:ext cx="10972800" cy="5166360"/>
           </a:xfrm>
           <a:prstGeom prst="rect">
             <a:avLst/>
@@ -4818,7 +4818,7 @@
         <p:spPr>
           <a:xfrm>
             <a:off x="640080" y="1463040"/>
-            <a:ext cx="10972800" cy="4937760"/>
+            <a:ext cx="10972800" cy="4023360"/>
           </a:xfrm>
           <a:prstGeom prst="rect">
             <a:avLst/>
@@ -5189,7 +5189,7 @@
         <p:spPr>
           <a:xfrm>
             <a:off x="640080" y="1463040"/>
-            <a:ext cx="10972800" cy="4937760"/>
+            <a:ext cx="10972800" cy="5212080"/>
           </a:xfrm>
           <a:prstGeom prst="rect">
             <a:avLst/>
@@ -5559,7 +5559,7 @@
         <p:spPr>
           <a:xfrm>
             <a:off x="640080" y="1463040"/>
-            <a:ext cx="10972800" cy="4937760"/>
+            <a:ext cx="10972800" cy="5212080"/>
           </a:xfrm>
           <a:prstGeom prst="rect">
             <a:avLst/>
@@ -6405,7 +6405,7 @@
         </p:nvGraphicFramePr>
         <p:xfrm>
           <a:off x="502920" y="1463040"/>
-          <a:ext cx="11155680" cy="3108960"/>
+          <a:ext cx="11155680" cy="2377440"/>
         </p:xfrm>
         <a:graphic>
           <a:graphicData uri="http://schemas.openxmlformats.org/drawingml/2006/table">
@@ -6414,12 +6414,12 @@
                 <a:tableStyleId>{5C22544A-7EE6-4342-B048-85BDC9FD1C3A}</a:tableStyleId>
               </a:tblPr>
               <a:tblGrid>
-                <a:gridCol w="640080"/>
-                <a:gridCol w="2377440"/>
-                <a:gridCol w="5760720"/>
-                <a:gridCol w="2377440"/>
+                <a:gridCol w="594360"/>
+                <a:gridCol w="2194560"/>
+                <a:gridCol w="5806440"/>
+                <a:gridCol w="2560320"/>
               </a:tblGrid>
-              <a:tr h="621792">
+              <a:tr h="475488">
                 <a:tc>
                   <a:txBody>
                     <a:bodyPr/>
@@ -6509,7 +6509,7 @@
                   </a:tcPr>
                 </a:tc>
               </a:tr>
-              <a:tr h="621792">
+              <a:tr h="475488">
                 <a:tc>
                   <a:txBody>
                     <a:bodyPr/>
@@ -6566,7 +6566,7 @@
                           </a:solidFill>
                           <a:latin typeface="Calibri"/>
                         </a:rPr>
-                        <a:t>2,298 phone photos, 1,373 patients, 21 patient-detail fields</a:t>
+                        <a:t>2,298 phone photos, 1,373 patients, 21 fields</a:t>
                       </a:r>
                     </a:p>
                   </a:txBody>
@@ -6599,7 +6599,7 @@
                   </a:tcPr>
                 </a:tc>
               </a:tr>
-              <a:tr h="621792">
+              <a:tr h="475488">
                 <a:tc>
                   <a:txBody>
                     <a:bodyPr/>
@@ -6656,7 +6656,7 @@
                           </a:solidFill>
                           <a:latin typeface="Calibri"/>
                         </a:rPr>
-                        <a:t>10,015 dermoscopy images + a lesion outline for every one</a:t>
+                        <a:t>10,015 dermoscopy images + lesion outlines</a:t>
                       </a:r>
                     </a:p>
                   </a:txBody>
@@ -6689,7 +6689,7 @@
                   </a:tcPr>
                 </a:tc>
               </a:tr>
-              <a:tr h="621792">
+              <a:tr h="475488">
                 <a:tc>
                   <a:txBody>
                     <a:bodyPr/>
@@ -6746,7 +6746,7 @@
                           </a:solidFill>
                           <a:latin typeface="Calibri"/>
                         </a:rPr>
-                        <a:t>25,331 images with built-in shortcut splits</a:t>
+                        <a:t>25,331 images with shortcut splits</a:t>
                       </a:r>
                     </a:p>
                   </a:txBody>
@@ -6779,7 +6779,7 @@
                   </a:tcPr>
                 </a:tc>
               </a:tr>
-              <a:tr h="621792">
+              <a:tr h="475488">
                 <a:tc>
                   <a:txBody>
                     <a:bodyPr/>
@@ -6836,7 +6836,7 @@
                           </a:solidFill>
                           <a:latin typeface="Calibri"/>
                         </a:rPr>
-                        <a:t>656 biopsy-proven images across skin tones</a:t>
+                        <a:t>656 biopsy-proven, skin-tone balanced</a:t>
                       </a:r>
                     </a:p>
                   </a:txBody>
@@ -6858,7 +6858,7 @@
                           </a:solidFill>
                           <a:latin typeface="Calibri"/>
                         </a:rPr>
-                        <a:t>Fairness - access pending</a:t>
+                        <a:t>Fairness (pending)</a:t>
                       </a:r>
                     </a:p>
                   </a:txBody>
@@ -6882,7 +6882,7 @@
         <p:spPr>
           <a:xfrm>
             <a:off x="640080" y="4800600"/>
-            <a:ext cx="10972800" cy="4937760"/>
+            <a:ext cx="10972800" cy="1874520"/>
           </a:xfrm>
           <a:prstGeom prst="rect">
             <a:avLst/>
@@ -7141,7 +7141,7 @@
         <p:spPr>
           <a:xfrm>
             <a:off x="640080" y="1508760"/>
-            <a:ext cx="10972800" cy="4937760"/>
+            <a:ext cx="10972800" cy="3977639"/>
           </a:xfrm>
           <a:prstGeom prst="rect">
             <a:avLst/>
@@ -7564,7 +7564,7 @@
         <p:spPr>
           <a:xfrm>
             <a:off x="640080" y="1463040"/>
-            <a:ext cx="10972800" cy="4937760"/>
+            <a:ext cx="10972800" cy="3703320"/>
           </a:xfrm>
           <a:prstGeom prst="rect">
             <a:avLst/>
@@ -7976,8 +7976,8 @@
         </p:blipFill>
         <p:spPr>
           <a:xfrm>
-            <a:off x="640080" y="1417320"/>
-            <a:ext cx="11060097" cy="4206240"/>
+            <a:off x="365760" y="2468880"/>
+            <a:ext cx="5486400" cy="2086520"/>
           </a:xfrm>
           <a:prstGeom prst="rect">
             <a:avLst/>
@@ -7992,8 +7992,8 @@
         </p:nvSpPr>
         <p:spPr>
           <a:xfrm>
-            <a:off x="6858000" y="1645920"/>
-            <a:ext cx="4937760" cy="4937760"/>
+            <a:off x="6172200" y="1600200"/>
+            <a:ext cx="5669280" cy="5074920"/>
           </a:xfrm>
           <a:prstGeom prst="rect">
             <a:avLst/>
@@ -8293,8 +8293,8 @@
         </p:blipFill>
         <p:spPr>
           <a:xfrm>
-            <a:off x="548640" y="1371600"/>
-            <a:ext cx="8071883" cy="4297680"/>
+            <a:off x="365760" y="1965960"/>
+            <a:ext cx="5486400" cy="2921102"/>
           </a:xfrm>
           <a:prstGeom prst="rect">
             <a:avLst/>
@@ -8309,8 +8309,8 @@
         </p:nvSpPr>
         <p:spPr>
           <a:xfrm>
-            <a:off x="6309360" y="1554480"/>
-            <a:ext cx="5486400" cy="4937760"/>
+            <a:off x="6172200" y="1554480"/>
+            <a:ext cx="5669280" cy="5120640"/>
           </a:xfrm>
           <a:prstGeom prst="rect">
             <a:avLst/>
